--- a/topics/backprop/課外主題_倒傳遞演算法.pptx
+++ b/topics/backprop/課外主題_倒傳遞演算法.pptx
@@ -3254,7 +3254,7 @@
                 </a:solidFill>
                 <a:latin typeface="Microsoft JhengHei"/>
               </a:rPr>
-              <a:t>參考書：斎藤康毅《深度學習入門：基於 Python 的理論與實現》第 4 章 4.4 與第 5 章</a:t>
+              <a:t>參考書：斎藤康毅《深度學習入門：基於 Python 的理論與實現》第 4 章 4.3 至 4.4 節與第 5 章</a:t>
             </a:r>
           </a:p>
         </p:txBody>
@@ -14157,7 +14157,7 @@
                           </a:solidFill>
                           <a:latin typeface="Consolas"/>
                         </a:rPr>
-                        <a:t>4.4 節</a:t>
+                        <a:t>4.3 節</a:t>
                       </a:r>
                     </a:p>
                   </a:txBody>
@@ -16257,7 +16257,7 @@
                 </a:solidFill>
                 <a:latin typeface="Microsoft JhengHei"/>
               </a:rPr>
-              <a:t>課本 4.4 節，式(4.5)。不用微積分，只用導數的定義</a:t>
+              <a:t>課本 4.3 節，書頁 94 至 96。從導數的定義式 (4.4) 出發，不必推公式</a:t>
             </a:r>
           </a:p>
         </p:txBody>
@@ -18258,7 +18258,7 @@
                 </a:solidFill>
                 <a:latin typeface="Microsoft JhengHei"/>
               </a:rPr>
-              <a:t>參數個數取課本 4.5 節那個手寫數字辨識網路，784 進 50 隱藏 10 出</a:t>
+              <a:t>參數個數取課本 4.5.2 節訓練用的手寫數字辨識網路，784 進 50 隱藏 10 出</a:t>
             </a:r>
           </a:p>
         </p:txBody>

--- a/topics/backprop/課外主題_倒傳遞演算法.pptx
+++ b/topics/backprop/課外主題_倒傳遞演算法.pptx
@@ -3254,7 +3254,7 @@
                 </a:solidFill>
                 <a:latin typeface="Microsoft JhengHei"/>
               </a:rPr>
-              <a:t>參考書：斎藤康毅《深度學習入門：基於 Python 的理論與實現》第 4 章 4.3 至 4.4 節與第 5 章</a:t>
+              <a:t>115-1 深度學習於海事應用｜課外主題</a:t>
             </a:r>
           </a:p>
         </p:txBody>
@@ -3966,7 +3966,7 @@
                 </a:solidFill>
                 <a:latin typeface="Microsoft JhengHei"/>
               </a:rPr>
-              <a:t>課本 5.2 節。倒傳遞能成立，全靠這一條</a:t>
+              <a:t>倒傳遞能成立，全靠這一條</a:t>
             </a:r>
           </a:p>
         </p:txBody>
@@ -4360,7 +4360,7 @@
                 </a:solidFill>
                 <a:latin typeface="Microsoft JhengHei"/>
               </a:rPr>
-              <a:t>接下來兩頁，把課本用到的兩種節點各看一次。只有兩條規則，都背得起來。</a:t>
+              <a:t>接下來兩頁，把最常用的兩種節點各看一次。只有兩條規則，都背得起來。</a:t>
             </a:r>
           </a:p>
         </p:txBody>
@@ -4980,7 +4980,7 @@
                 </a:solidFill>
                 <a:latin typeface="Microsoft JhengHei"/>
               </a:rPr>
-              <a:t>課本 5.3.1 節。例子是 10 + 5 = 15，上游傳來 1.3</a:t>
+              <a:t>例子是 10 + 5 = 15，上游傳來 1.3</a:t>
             </a:r>
           </a:p>
         </p:txBody>
@@ -6759,7 +6759,7 @@
                 </a:solidFill>
                 <a:latin typeface="Microsoft JhengHei"/>
               </a:rPr>
-              <a:t>課本 5.3.2 節，式(5.6)。例子是 10 × 5 = 50，上游傳來 1.3</a:t>
+              <a:t>例子是 10 × 5 = 50，上游傳來 1.3</a:t>
             </a:r>
           </a:p>
         </p:txBody>
@@ -12689,7 +12689,7 @@
                 </a:solidFill>
                 <a:latin typeface="Microsoft JhengHei"/>
               </a:rPr>
-              <a:t>課本 5.7.3 節。倒傳遞寫錯不會報錯，所以一定要有一個判定式</a:t>
+              <a:t>倒傳遞寫錯不會報錯，所以一定要有一個判定式</a:t>
             </a:r>
           </a:p>
         </p:txBody>
@@ -13515,7 +13515,7 @@
                 </a:solidFill>
                 <a:latin typeface="Microsoft JhengHei"/>
               </a:rPr>
-              <a:t>浮點數不會剛好相等，所以門檻要自己訂。課本沒有給數字，只說差很大就是寫錯了。</a:t>
+              <a:t>浮點數不會剛好相等，所以門檻要自己訂：寫對時差非常接近 0，差很大就是寫錯了。</a:t>
             </a:r>
           </a:p>
           <a:p>
@@ -14036,7 +14036,7 @@
         </p:nvGraphicFramePr>
         <p:xfrm>
           <a:off x="731520" y="1143000"/>
-          <a:ext cx="10881360" cy="1810512"/>
+          <a:ext cx="10881360" cy="1508760"/>
         </p:xfrm>
         <a:graphic>
           <a:graphicData uri="http://schemas.openxmlformats.org/drawingml/2006/table">
@@ -14116,77 +14116,6 @@
                   <a:tcPr marL="36576" marR="36576" marT="9144" marB="9144">
                     <a:solidFill>
                       <a:srgbClr val="1F4E79"/>
-                    </a:solidFill>
-                  </a:tcPr>
-                </a:tc>
-              </a:tr>
-              <a:tr h="301752">
-                <a:tc>
-                  <a:txBody>
-                    <a:bodyPr/>
-                    <a:lstStyle/>
-                    <a:p>
-                      <a:pPr algn="ctr"/>
-                      <a:r>
-                        <a:rPr sz="1600" b="0">
-                          <a:solidFill>
-                            <a:srgbClr val="202020"/>
-                          </a:solidFill>
-                          <a:latin typeface="Consolas"/>
-                        </a:rPr>
-                        <a:t>課本章節</a:t>
-                      </a:r>
-                    </a:p>
-                  </a:txBody>
-                  <a:tcPr marL="36576" marR="36576" marT="9144" marB="9144">
-                    <a:solidFill>
-                      <a:srgbClr val="FFFFFF"/>
-                    </a:solidFill>
-                  </a:tcPr>
-                </a:tc>
-                <a:tc>
-                  <a:txBody>
-                    <a:bodyPr/>
-                    <a:lstStyle/>
-                    <a:p>
-                      <a:pPr algn="ctr"/>
-                      <a:r>
-                        <a:rPr sz="1600" b="0">
-                          <a:solidFill>
-                            <a:srgbClr val="202020"/>
-                          </a:solidFill>
-                          <a:latin typeface="Consolas"/>
-                        </a:rPr>
-                        <a:t>4.3 節</a:t>
-                      </a:r>
-                    </a:p>
-                  </a:txBody>
-                  <a:tcPr marL="36576" marR="36576" marT="9144" marB="9144">
-                    <a:solidFill>
-                      <a:srgbClr val="FFFFFF"/>
-                    </a:solidFill>
-                  </a:tcPr>
-                </a:tc>
-                <a:tc>
-                  <a:txBody>
-                    <a:bodyPr/>
-                    <a:lstStyle/>
-                    <a:p>
-                      <a:pPr algn="ctr"/>
-                      <a:r>
-                        <a:rPr sz="1600" b="0">
-                          <a:solidFill>
-                            <a:srgbClr val="202020"/>
-                          </a:solidFill>
-                          <a:latin typeface="Consolas"/>
-                        </a:rPr>
-                        <a:t>第 5 章</a:t>
-                      </a:r>
-                    </a:p>
-                  </a:txBody>
-                  <a:tcPr marL="36576" marR="36576" marT="9144" marB="9144">
-                    <a:solidFill>
-                      <a:srgbClr val="FFFFFF"/>
                     </a:solidFill>
                   </a:tcPr>
                 </a:tc>
@@ -15740,7 +15669,7 @@
                 </a:solidFill>
                 <a:latin typeface="Microsoft JhengHei"/>
               </a:rPr>
-              <a:t>課本給兩種算法。第一種叫數值微分，三行就寫得完，但是很貴；</a:t>
+              <a:t>梯度有兩種算法。第一種叫數值微分，三行就寫得完，但是很貴；</a:t>
             </a:r>
           </a:p>
           <a:p>
@@ -15763,17 +15692,6 @@
                 <a:latin typeface="Microsoft JhengHei"/>
               </a:rPr>
               <a:t>兩種都要學，因為最後要用第一種去驗第二種。</a:t>
-            </a:r>
-          </a:p>
-          <a:p>
-            <a:r>
-              <a:rPr sz="2000" b="0">
-                <a:solidFill>
-                  <a:srgbClr val="202020"/>
-                </a:solidFill>
-                <a:latin typeface="Microsoft JhengHei"/>
-              </a:rPr>
-              <a:t>課本簡體版把第二種寫作「误差反向传播法」，是同一個東西。</a:t>
             </a:r>
           </a:p>
         </p:txBody>
@@ -16257,7 +16175,7 @@
                 </a:solidFill>
                 <a:latin typeface="Microsoft JhengHei"/>
               </a:rPr>
-              <a:t>課本 4.3 節，書頁 94 至 96。從導數的定義式 (4.4) 出發，不必推公式</a:t>
+              <a:t>從導數的定義出發，不必推公式</a:t>
             </a:r>
           </a:p>
         </p:txBody>
@@ -17728,7 +17646,7 @@
                 </a:solidFill>
                 <a:latin typeface="Microsoft JhengHei"/>
               </a:rPr>
-              <a:t>h 取太小反而更不準，這是數值微分自己的毛病，課本把 h 定在 1e-4 就是在避這一點。</a:t>
+              <a:t>h 取太小反而更不準，這是數值微分自己的毛病，所以 h 定在 1e-4。</a:t>
             </a:r>
           </a:p>
         </p:txBody>
@@ -18258,7 +18176,7 @@
                 </a:solidFill>
                 <a:latin typeface="Microsoft JhengHei"/>
               </a:rPr>
-              <a:t>參數個數取課本 4.5.2 節訓練用的手寫數字辨識網路，784 進 50 隱藏 10 出</a:t>
+              <a:t>以手寫數字辨識網路為例：784 個輸入、50 個隱藏、10 個輸出</a:t>
             </a:r>
           </a:p>
         </p:txBody>
@@ -19306,7 +19224,7 @@
                 </a:solidFill>
                 <a:latin typeface="Microsoft JhengHei"/>
               </a:rPr>
-              <a:t>四、換一組示範資料：課本 5.1 的蘋果例子</a:t>
+              <a:t>四、換一組示範資料：買蘋果</a:t>
             </a:r>
           </a:p>
         </p:txBody>
@@ -19639,7 +19557,7 @@
                 </a:solidFill>
                 <a:latin typeface="Microsoft JhengHei"/>
               </a:rPr>
-              <a:t>課本之所以從一個買蘋果的問題開始講倒傳遞，理由在第七節：</a:t>
+              <a:t>之所以從一個買蘋果的問題開始講倒傳遞，理由在第七節：</a:t>
             </a:r>
           </a:p>
           <a:p>
@@ -21778,7 +21696,7 @@
                 </a:solidFill>
                 <a:latin typeface="Microsoft JhengHei"/>
               </a:rPr>
-              <a:t>課本 5.1.2 節。這是計算圖唯一的規矩</a:t>
+              <a:t>這是計算圖唯一的規矩</a:t>
             </a:r>
           </a:p>
         </p:txBody>
@@ -23171,7 +23089,7 @@
                 </a:solidFill>
                 <a:latin typeface="Microsoft JhengHei"/>
               </a:rPr>
-              <a:t>課本 5.1.3 節。這就是導數，而導數正是梯度下降要的那個東西</a:t>
+              <a:t>這就是導數，而導數正是梯度下降要的那個東西</a:t>
             </a:r>
           </a:p>
         </p:txBody>
